--- a/docs/deck/SmartTraffic-full.pptx
+++ b/docs/deck/SmartTraffic-full.pptx
@@ -120,44 +120,44 @@
   <p:extLst>
     <p:ext uri="{521415D9-36F7-43E2-AB2F-B90AF26B5E84}">
       <p14:sectionLst xmlns:p14="http://schemas.microsoft.com/office/powerpoint/2010/main">
-        <p14:section name="Opening" id="{ef9c2b00-fbd5-7443-c51a-4695623f0b0a}">
+        <p14:section name="Opening" id="{6d213715-99b0-94c5-bdd9-145dd24d8368}">
           <p14:sldIdLst>
             <p14:sldId id="256"/>
           </p14:sldIdLst>
         </p14:section>
-        <p14:section name="Problem" id="{5c030e7f-7bd6-41ec-d6c8-210815196ea0}">
+        <p14:section name="Problem" id="{bc79f5c3-d6a1-d31b-f467-1ef8db864a48}">
           <p14:sldIdLst>
             <p14:sldId id="257"/>
             <p14:sldId id="258"/>
           </p14:sldIdLst>
         </p14:section>
-        <p14:section name="The novelty" id="{cab5f622-76f0-e955-3bcd-74af351d8115}">
+        <p14:section name="The novelty" id="{adaf4df9-df18-9289-eb4d-211a3a2c4c66}">
           <p14:sldIdLst>
             <p14:sldId id="259"/>
             <p14:sldId id="260"/>
             <p14:sldId id="261"/>
           </p14:sldIdLst>
         </p14:section>
-        <p14:section name="Method" id="{b4dd66c8-759d-09f6-9ab5-fb9b0ebef8a9}">
+        <p14:section name="Method" id="{fd9c7704-fba8-a788-ad95-083fd7d12bf0}">
           <p14:sldIdLst>
             <p14:sldId id="262"/>
           </p14:sldIdLst>
         </p14:section>
-        <p14:section name="Results" id="{95346e07-6d1f-c14a-e03a-aec1bec6e475}">
+        <p14:section name="Results" id="{656757dc-be34-0413-8f7b-c66922a9cd21}">
           <p14:sldIdLst>
             <p14:sldId id="263"/>
             <p14:sldId id="264"/>
             <p14:sldId id="265"/>
           </p14:sldIdLst>
         </p14:section>
-        <p14:section name="Deployability" id="{89f870e9-44b4-bf83-aa50-5b199163d80d}">
+        <p14:section name="Deployability" id="{4bcfff94-073f-5566-80ee-0fe4c8b18d73}">
           <p14:sldIdLst>
             <p14:sldId id="266"/>
             <p14:sldId id="267"/>
             <p14:sldId id="268"/>
           </p14:sldIdLst>
         </p14:section>
-        <p14:section name="Close" id="{521d1863-39e4-fb00-55f8-2b252746bfd4}">
+        <p14:section name="Close" id="{e545a648-110e-73b2-ad48-abb23e3b9fda}">
           <p14:sldIdLst>
             <p14:sldId id="269"/>
           </p14:sldIdLst>
@@ -234,7 +234,7 @@
           </c:spPr>
           <c:invertIfNegative val="0"/>
           <c:dLbls>
-            <c:numFmt formatCode="#,##0" sourceLinked="0"/>
+            <c:numFmt formatCode="0.00" sourceLinked="0"/>
             <c:txPr>
               <a:bodyPr/>
               <a:lstStyle/>
@@ -323,7 +323,7 @@
           </c:spPr>
           <c:invertIfNegative val="0"/>
           <c:dLbls>
-            <c:numFmt formatCode="#,##0" sourceLinked="0"/>
+            <c:numFmt formatCode="0.00" sourceLinked="0"/>
             <c:txPr>
               <a:bodyPr/>
               <a:lstStyle/>
@@ -391,7 +391,7 @@
           </c:val>
         </c:ser>
         <c:dLbls>
-          <c:numFmt formatCode="#,##0" sourceLinked="0"/>
+          <c:numFmt formatCode="0.00" sourceLinked="0"/>
           <c:txPr>
             <a:bodyPr/>
             <a:lstStyle/>
@@ -466,6 +466,7 @@
         <c:scaling>
           <c:orientation val="minMax"/>
           <c:max val="3.2"/>
+          <c:min val="0"/>
         </c:scaling>
         <c:delete val="0"/>
         <c:axPos val="l"/>
@@ -797,6 +798,7 @@
         <c:axId val="2094734552"/>
         <c:scaling>
           <c:orientation val="minMax"/>
+          <c:min val="0"/>
         </c:scaling>
         <c:delete val="0"/>
         <c:axPos val="l"/>
@@ -1102,6 +1104,7 @@
         <c:scaling>
           <c:orientation val="minMax"/>
           <c:max val="46000"/>
+          <c:min val="0"/>
         </c:scaling>
         <c:delete val="0"/>
         <c:axPos val="l"/>
@@ -1407,6 +1410,7 @@
         <c:scaling>
           <c:orientation val="minMax"/>
           <c:max val="215"/>
+          <c:min val="0"/>
         </c:scaling>
         <c:delete val="0"/>
         <c:axPos val="l"/>
@@ -3134,7 +3138,7 @@
         <p:txBody>
           <a:bodyPr wrap="square" rtlCol="0"/>
           <a:lstStyle>
-            <a:lvl1pPr indent="0" marL="0">
+            <a:lvl1pPr algn="l" indent="0" marL="0">
               <a:buNone/>
               <a:defRPr lang="en-US" sz="4400" b="1" dirty="0">
                 <a:solidFill>
@@ -3144,7 +3148,7 @@
             </a:lvl1pPr>
           </a:lstStyle>
           <a:p>
-            <a:pPr indent="0" marL="0">
+            <a:pPr algn="l" indent="0" marL="0">
               <a:buNone/>
             </a:pPr>
             <a:endParaRPr lang="en-US" sz="4400" dirty="0"/>
@@ -3244,7 +3248,7 @@
         <p:txBody>
           <a:bodyPr wrap="square" rtlCol="0"/>
           <a:lstStyle>
-            <a:lvl1pPr indent="0" marL="0">
+            <a:lvl1pPr algn="l" indent="0" marL="0">
               <a:buNone/>
               <a:defRPr lang="en-US" sz="3800" b="1" dirty="0">
                 <a:solidFill>
@@ -3254,7 +3258,7 @@
             </a:lvl1pPr>
           </a:lstStyle>
           <a:p>
-            <a:pPr indent="0" marL="0">
+            <a:pPr algn="l" indent="0" marL="0">
               <a:buNone/>
             </a:pPr>
             <a:endParaRPr lang="en-US" sz="3800" dirty="0"/>
@@ -3354,7 +3358,7 @@
         <p:txBody>
           <a:bodyPr wrap="square" rtlCol="0"/>
           <a:lstStyle>
-            <a:lvl1pPr indent="0" marL="0">
+            <a:lvl1pPr algn="l" indent="0" marL="0">
               <a:buNone/>
               <a:defRPr lang="en-US" sz="3600" b="1" dirty="0">
                 <a:solidFill>
@@ -3364,7 +3368,7 @@
             </a:lvl1pPr>
           </a:lstStyle>
           <a:p>
-            <a:pPr indent="0" marL="0">
+            <a:pPr algn="l" indent="0" marL="0">
               <a:buNone/>
             </a:pPr>
             <a:endParaRPr lang="en-US" sz="3600" dirty="0"/>
@@ -3506,7 +3510,7 @@
         <p:txBody>
           <a:bodyPr wrap="square" rtlCol="0"/>
           <a:lstStyle>
-            <a:lvl1pPr indent="0" marL="0">
+            <a:lvl1pPr algn="l" indent="0" marL="0">
               <a:buNone/>
               <a:defRPr lang="en-US" sz="3600" b="1" dirty="0">
                 <a:solidFill>
@@ -3516,7 +3520,7 @@
             </a:lvl1pPr>
           </a:lstStyle>
           <a:p>
-            <a:pPr indent="0" marL="0">
+            <a:pPr algn="l" indent="0" marL="0">
               <a:buNone/>
             </a:pPr>
             <a:endParaRPr lang="en-US" sz="3600" dirty="0"/>
@@ -3978,7 +3982,7 @@
           <a:bodyPr wrap="square" rtlCol="0"/>
           <a:lstStyle/>
           <a:p>
-            <a:pPr indent="0" marL="0">
+            <a:pPr algn="l" indent="0" marL="0">
               <a:buNone/>
             </a:pPr>
             <a:r>
@@ -4328,7 +4332,7 @@
           <a:bodyPr wrap="square" rtlCol="0"/>
           <a:lstStyle/>
           <a:p>
-            <a:pPr indent="0" marL="0">
+            <a:pPr algn="l" indent="0" marL="0">
               <a:buNone/>
             </a:pPr>
             <a:r>
@@ -4890,7 +4894,7 @@
           <a:bodyPr wrap="square" rtlCol="0"/>
           <a:lstStyle/>
           <a:p>
-            <a:pPr indent="0" marL="0">
+            <a:pPr algn="l" indent="0" marL="0">
               <a:buNone/>
             </a:pPr>
             <a:r>
@@ -5506,7 +5510,7 @@
           <a:bodyPr wrap="square" rtlCol="0"/>
           <a:lstStyle/>
           <a:p>
-            <a:pPr indent="0" marL="0">
+            <a:pPr algn="l" indent="0" marL="0">
               <a:buNone/>
             </a:pPr>
             <a:r>
@@ -6043,7 +6047,7 @@
           <a:bodyPr wrap="square" rtlCol="0"/>
           <a:lstStyle/>
           <a:p>
-            <a:pPr indent="0" marL="0">
+            <a:pPr algn="l" indent="0" marL="0">
               <a:buNone/>
             </a:pPr>
             <a:r>
@@ -6559,7 +6563,7 @@
           <a:bodyPr wrap="square" rtlCol="0"/>
           <a:lstStyle/>
           <a:p>
-            <a:pPr indent="0" marL="0">
+            <a:pPr algn="l" indent="0" marL="0">
               <a:buNone/>
             </a:pPr>
             <a:r>
@@ -6788,7 +6792,7 @@
           <a:bodyPr wrap="square" rtlCol="0"/>
           <a:lstStyle/>
           <a:p>
-            <a:pPr indent="0" marL="0">
+            <a:pPr algn="l" indent="0" marL="0">
               <a:buNone/>
             </a:pPr>
             <a:r>
@@ -7331,7 +7335,7 @@
           <a:bodyPr wrap="square" rtlCol="0"/>
           <a:lstStyle/>
           <a:p>
-            <a:pPr indent="0" marL="0">
+            <a:pPr algn="l" indent="0" marL="0">
               <a:buNone/>
             </a:pPr>
             <a:r>
@@ -7783,7 +7787,7 @@
           <a:bodyPr wrap="square" rtlCol="0"/>
           <a:lstStyle/>
           <a:p>
-            <a:pPr indent="0" marL="0">
+            <a:pPr algn="l" indent="0" marL="0">
               <a:buNone/>
             </a:pPr>
             <a:r>
@@ -7896,7 +7900,7 @@
           <a:bodyPr wrap="square" rtlCol="0"/>
           <a:lstStyle/>
           <a:p>
-            <a:pPr indent="0" marL="0">
+            <a:pPr algn="l" indent="0" marL="0">
               <a:buNone/>
             </a:pPr>
             <a:r>
@@ -8187,7 +8191,7 @@
           <a:bodyPr wrap="square" rtlCol="0"/>
           <a:lstStyle/>
           <a:p>
-            <a:pPr indent="0" marL="0">
+            <a:pPr algn="l" indent="0" marL="0">
               <a:buNone/>
             </a:pPr>
             <a:r>
@@ -8494,7 +8498,7 @@
           <a:bodyPr wrap="square" rtlCol="0"/>
           <a:lstStyle/>
           <a:p>
-            <a:pPr indent="0" marL="0">
+            <a:pPr algn="l" indent="0" marL="0">
               <a:buNone/>
             </a:pPr>
             <a:r>
@@ -9254,7 +9258,7 @@
           <a:bodyPr wrap="square" rtlCol="0"/>
           <a:lstStyle/>
           <a:p>
-            <a:pPr indent="0" marL="0">
+            <a:pPr algn="l" indent="0" marL="0">
               <a:buNone/>
             </a:pPr>
             <a:r>
@@ -9442,7 +9446,7 @@
           <a:bodyPr wrap="square" rtlCol="0"/>
           <a:lstStyle/>
           <a:p>
-            <a:pPr indent="0" marL="0">
+            <a:pPr algn="l" indent="0" marL="0">
               <a:buNone/>
             </a:pPr>
             <a:r>

--- a/docs/deck/SmartTraffic-full.pptx
+++ b/docs/deck/SmartTraffic-full.pptx
@@ -120,44 +120,44 @@
   <p:extLst>
     <p:ext uri="{521415D9-36F7-43E2-AB2F-B90AF26B5E84}">
       <p14:sectionLst xmlns:p14="http://schemas.microsoft.com/office/powerpoint/2010/main">
-        <p14:section name="Opening" id="{6d213715-99b0-94c5-bdd9-145dd24d8368}">
+        <p14:section name="Opening" id="{4d03c8c9-e649-9df5-f280-6b5135f24dd1}">
           <p14:sldIdLst>
             <p14:sldId id="256"/>
           </p14:sldIdLst>
         </p14:section>
-        <p14:section name="Problem" id="{bc79f5c3-d6a1-d31b-f467-1ef8db864a48}">
+        <p14:section name="Problem" id="{02816636-7aa8-73a5-88dd-69efb34e2c04}">
           <p14:sldIdLst>
             <p14:sldId id="257"/>
             <p14:sldId id="258"/>
           </p14:sldIdLst>
         </p14:section>
-        <p14:section name="The novelty" id="{adaf4df9-df18-9289-eb4d-211a3a2c4c66}">
+        <p14:section name="The novelty" id="{c32cfb3f-bbe0-c1d6-0cad-5c7bb16e6993}">
           <p14:sldIdLst>
             <p14:sldId id="259"/>
             <p14:sldId id="260"/>
             <p14:sldId id="261"/>
           </p14:sldIdLst>
         </p14:section>
-        <p14:section name="Method" id="{fd9c7704-fba8-a788-ad95-083fd7d12bf0}">
+        <p14:section name="Method" id="{f5bd2a7e-7b43-92d2-2c43-e14ed98f7984}">
           <p14:sldIdLst>
             <p14:sldId id="262"/>
           </p14:sldIdLst>
         </p14:section>
-        <p14:section name="Results" id="{656757dc-be34-0413-8f7b-c66922a9cd21}">
+        <p14:section name="Results" id="{a04a95a8-5c2e-b631-d3aa-05b7b41bbdbb}">
           <p14:sldIdLst>
             <p14:sldId id="263"/>
             <p14:sldId id="264"/>
             <p14:sldId id="265"/>
           </p14:sldIdLst>
         </p14:section>
-        <p14:section name="Deployability" id="{4bcfff94-073f-5566-80ee-0fe4c8b18d73}">
+        <p14:section name="Deployability" id="{173d2d04-fa0a-2b0f-e664-0d7c8200d78d}">
           <p14:sldIdLst>
             <p14:sldId id="266"/>
             <p14:sldId id="267"/>
             <p14:sldId id="268"/>
           </p14:sldIdLst>
         </p14:section>
-        <p14:section name="Close" id="{e545a648-110e-73b2-ad48-abb23e3b9fda}">
+        <p14:section name="Close" id="{88977661-7cbd-35d8-0e0d-75d6b4f44ecb}">
           <p14:sldIdLst>
             <p14:sldId id="269"/>
           </p14:sldIdLst>
@@ -185,7 +185,7 @@
             <a:pPr>
               <a:defRPr sz="1300" b="0" i="0" u="none" strike="noStrike">
                 <a:solidFill>
-                  <a:srgbClr val="44525F"/>
+                  <a:srgbClr val="57534B"/>
                 </a:solidFill>
                 <a:latin typeface="+mn-lt"/>
               </a:defRPr>
@@ -193,7 +193,7 @@
             <a:r>
               <a:rPr sz="1300" b="0" i="0" u="none" strike="noStrike">
                 <a:solidFill>
-                  <a:srgbClr val="44525F"/>
+                  <a:srgbClr val="57534B"/>
                 </a:solidFill>
                 <a:latin typeface="+mn-lt"/>
               </a:rPr>
@@ -228,7 +228,7 @@
           </c:tx>
           <c:spPr>
             <a:solidFill>
-              <a:srgbClr val="94A7B8"/>
+              <a:srgbClr val="8C887F"/>
             </a:solidFill>
             <a:effectLst/>
           </c:spPr>
@@ -242,7 +242,7 @@
                 <a:pPr>
                   <a:defRPr b="0" i="0" strike="noStrike" sz="1100" u="none">
                     <a:solidFill>
-                      <a:srgbClr val="44525F"/>
+                      <a:srgbClr val="57534B"/>
                     </a:solidFill>
                     <a:latin typeface="+mn-lt"/>
                   </a:defRPr>
@@ -317,7 +317,7 @@
           </c:tx>
           <c:spPr>
             <a:solidFill>
-              <a:srgbClr val="FFB347"/>
+              <a:srgbClr val="E8A33D"/>
             </a:solidFill>
             <a:effectLst/>
           </c:spPr>
@@ -331,7 +331,7 @@
                 <a:pPr>
                   <a:defRPr b="0" i="0" strike="noStrike" sz="1100" u="none">
                     <a:solidFill>
-                      <a:srgbClr val="44525F"/>
+                      <a:srgbClr val="57534B"/>
                     </a:solidFill>
                     <a:latin typeface="+mn-lt"/>
                   </a:defRPr>
@@ -399,7 +399,7 @@
               <a:pPr>
                 <a:defRPr b="0" i="0" strike="noStrike" sz="1100" u="none">
                   <a:solidFill>
-                    <a:srgbClr val="44525F"/>
+                    <a:srgbClr val="57534B"/>
                   </a:solidFill>
                   <a:latin typeface="+mn-lt"/>
                 </a:defRPr>
@@ -447,7 +447,7 @@
             <a:pPr>
               <a:defRPr sz="1100" b="0" i="0" u="none" strike="noStrike">
                 <a:solidFill>
-                  <a:srgbClr val="94A7B8"/>
+                  <a:srgbClr val="8C887F"/>
                 </a:solidFill>
                 <a:latin typeface="+mn-lt"/>
               </a:defRPr>
@@ -474,7 +474,7 @@
           <c:spPr>
             <a:ln w="12700" cap="flat">
               <a:solidFill>
-                <a:srgbClr val="DCE4EB"/>
+                <a:srgbClr val="D6D1C7"/>
               </a:solidFill>
               <a:prstDash val="solid"/>
               <a:round/>
@@ -501,7 +501,7 @@
             <a:pPr>
               <a:defRPr sz="1100" b="0" i="0" u="none" strike="noStrike">
                 <a:solidFill>
-                  <a:srgbClr val="94A7B8"/>
+                  <a:srgbClr val="8C887F"/>
                 </a:solidFill>
                 <a:latin typeface="+mn-lt"/>
               </a:defRPr>
@@ -531,7 +531,7 @@
           <a:pPr>
             <a:defRPr sz="1100">
               <a:solidFill>
-                <a:srgbClr val="44525F"/>
+                <a:srgbClr val="57534B"/>
               </a:solidFill>
               <a:latin typeface="+mn-lt"/>
               <a:cs typeface="+mn-lt"/>
@@ -571,7 +571,7 @@
             <a:pPr>
               <a:defRPr sz="1300" b="0" i="0" u="none" strike="noStrike">
                 <a:solidFill>
-                  <a:srgbClr val="44525F"/>
+                  <a:srgbClr val="57534B"/>
                 </a:solidFill>
                 <a:latin typeface="+mn-lt"/>
               </a:defRPr>
@@ -579,7 +579,7 @@
             <a:r>
               <a:rPr sz="1300" b="0" i="0" u="none" strike="noStrike">
                 <a:solidFill>
-                  <a:srgbClr val="44525F"/>
+                  <a:srgbClr val="57534B"/>
                 </a:solidFill>
                 <a:latin typeface="+mn-lt"/>
               </a:rPr>
@@ -612,11 +612,11 @@
           </c:tx>
           <c:spPr>
             <a:solidFill>
-              <a:srgbClr val="FF5A5A"/>
+              <a:srgbClr val="C8503F"/>
             </a:solidFill>
             <a:ln w="50800" cap="flat">
               <a:solidFill>
-                <a:srgbClr val="FF5A5A"/>
+                <a:srgbClr val="C8503F"/>
               </a:solidFill>
               <a:prstDash val="solid"/>
               <a:round/>
@@ -633,7 +633,7 @@
                 <a:pPr>
                   <a:defRPr b="0" i="0" strike="noStrike" sz="1100" u="none">
                     <a:solidFill>
-                      <a:srgbClr val="44525F"/>
+                      <a:srgbClr val="57534B"/>
                     </a:solidFill>
                     <a:latin typeface="+mn-lt"/>
                   </a:defRPr>
@@ -654,11 +654,11 @@
             <c:size val="6"/>
             <c:spPr>
               <a:solidFill>
-                <a:srgbClr val="FF5A5A"/>
+                <a:srgbClr val="C8503F"/>
               </a:solidFill>
               <a:ln w="9525" cap="flat">
                 <a:solidFill>
-                  <a:srgbClr val="FF5A5A"/>
+                  <a:srgbClr val="C8503F"/>
                 </a:solidFill>
                 <a:prstDash val="solid"/>
                 <a:round/>
@@ -732,7 +732,7 @@
               <a:pPr>
                 <a:defRPr b="0" i="0" strike="noStrike" sz="1100" u="none">
                   <a:solidFill>
-                    <a:srgbClr val="44525F"/>
+                    <a:srgbClr val="57534B"/>
                   </a:solidFill>
                   <a:latin typeface="+mn-lt"/>
                 </a:defRPr>
@@ -780,7 +780,7 @@
             <a:pPr>
               <a:defRPr sz="1100" b="0" i="0" u="none" strike="noStrike">
                 <a:solidFill>
-                  <a:srgbClr val="94A7B8"/>
+                  <a:srgbClr val="8C887F"/>
                 </a:solidFill>
                 <a:latin typeface="+mn-lt"/>
               </a:defRPr>
@@ -806,7 +806,7 @@
           <c:spPr>
             <a:ln w="12700" cap="flat">
               <a:solidFill>
-                <a:srgbClr val="DCE4EB"/>
+                <a:srgbClr val="D6D1C7"/>
               </a:solidFill>
               <a:prstDash val="solid"/>
               <a:round/>
@@ -833,7 +833,7 @@
             <a:pPr>
               <a:defRPr sz="1100" b="0" i="0" u="none" strike="noStrike">
                 <a:solidFill>
-                  <a:srgbClr val="94A7B8"/>
+                  <a:srgbClr val="8C887F"/>
                 </a:solidFill>
                 <a:latin typeface="+mn-lt"/>
               </a:defRPr>
@@ -883,7 +883,7 @@
             <a:pPr>
               <a:defRPr sz="1300" b="0" i="0" u="none" strike="noStrike">
                 <a:solidFill>
-                  <a:srgbClr val="44525F"/>
+                  <a:srgbClr val="57534B"/>
                 </a:solidFill>
                 <a:latin typeface="+mn-lt"/>
               </a:defRPr>
@@ -891,7 +891,7 @@
             <a:r>
               <a:rPr sz="1300" b="0" i="0" u="none" strike="noStrike">
                 <a:solidFill>
-                  <a:srgbClr val="44525F"/>
+                  <a:srgbClr val="57534B"/>
                 </a:solidFill>
                 <a:latin typeface="+mn-lt"/>
               </a:rPr>
@@ -926,7 +926,7 @@
           </c:tx>
           <c:spPr>
             <a:solidFill>
-              <a:srgbClr val="94A7B8"/>
+              <a:srgbClr val="8C887F"/>
             </a:solidFill>
             <a:effectLst/>
           </c:spPr>
@@ -940,7 +940,7 @@
                 <a:pPr>
                   <a:defRPr b="0" i="0" strike="noStrike" sz="1100" u="none">
                     <a:solidFill>
-                      <a:srgbClr val="44525F"/>
+                      <a:srgbClr val="57534B"/>
                     </a:solidFill>
                     <a:latin typeface="+mn-lt"/>
                   </a:defRPr>
@@ -961,7 +961,7 @@
             <c:bubble3D val="0"/>
             <c:spPr>
               <a:solidFill>
-                <a:srgbClr val="94A7B8"/>
+                <a:srgbClr val="8C887F"/>
               </a:solidFill>
               <a:effectLst/>
             </c:spPr>
@@ -972,7 +972,7 @@
             <c:bubble3D val="0"/>
             <c:spPr>
               <a:solidFill>
-                <a:srgbClr val="FF5A5A"/>
+                <a:srgbClr val="C8503F"/>
               </a:solidFill>
               <a:effectLst/>
             </c:spPr>
@@ -983,7 +983,7 @@
             <c:bubble3D val="0"/>
             <c:spPr>
               <a:solidFill>
-                <a:srgbClr val="3CE87C"/>
+                <a:srgbClr val="6AA84F"/>
               </a:solidFill>
               <a:effectLst/>
             </c:spPr>
@@ -1037,7 +1037,7 @@
               <a:pPr>
                 <a:defRPr b="0" i="0" strike="noStrike" sz="1100" u="none">
                   <a:solidFill>
-                    <a:srgbClr val="44525F"/>
+                    <a:srgbClr val="57534B"/>
                   </a:solidFill>
                   <a:latin typeface="+mn-lt"/>
                 </a:defRPr>
@@ -1085,7 +1085,7 @@
             <a:pPr>
               <a:defRPr sz="1100" b="0" i="0" u="none" strike="noStrike">
                 <a:solidFill>
-                  <a:srgbClr val="94A7B8"/>
+                  <a:srgbClr val="8C887F"/>
                 </a:solidFill>
                 <a:latin typeface="+mn-lt"/>
               </a:defRPr>
@@ -1112,7 +1112,7 @@
           <c:spPr>
             <a:ln w="12700" cap="flat">
               <a:solidFill>
-                <a:srgbClr val="DCE4EB"/>
+                <a:srgbClr val="D6D1C7"/>
               </a:solidFill>
               <a:prstDash val="solid"/>
               <a:round/>
@@ -1139,7 +1139,7 @@
             <a:pPr>
               <a:defRPr sz="1100" b="0" i="0" u="none" strike="noStrike">
                 <a:solidFill>
-                  <a:srgbClr val="94A7B8"/>
+                  <a:srgbClr val="8C887F"/>
                 </a:solidFill>
                 <a:latin typeface="+mn-lt"/>
               </a:defRPr>
@@ -1189,7 +1189,7 @@
             <a:pPr>
               <a:defRPr sz="1300" b="0" i="0" u="none" strike="noStrike">
                 <a:solidFill>
-                  <a:srgbClr val="44525F"/>
+                  <a:srgbClr val="57534B"/>
                 </a:solidFill>
                 <a:latin typeface="+mn-lt"/>
               </a:defRPr>
@@ -1197,7 +1197,7 @@
             <a:r>
               <a:rPr sz="1300" b="0" i="0" u="none" strike="noStrike">
                 <a:solidFill>
-                  <a:srgbClr val="44525F"/>
+                  <a:srgbClr val="57534B"/>
                 </a:solidFill>
                 <a:latin typeface="+mn-lt"/>
               </a:rPr>
@@ -1232,7 +1232,7 @@
           </c:tx>
           <c:spPr>
             <a:solidFill>
-              <a:srgbClr val="94A7B8"/>
+              <a:srgbClr val="8C887F"/>
             </a:solidFill>
             <a:effectLst/>
           </c:spPr>
@@ -1246,7 +1246,7 @@
                 <a:pPr>
                   <a:defRPr b="0" i="0" strike="noStrike" sz="1100" u="none">
                     <a:solidFill>
-                      <a:srgbClr val="44525F"/>
+                      <a:srgbClr val="57534B"/>
                     </a:solidFill>
                     <a:latin typeface="+mn-lt"/>
                   </a:defRPr>
@@ -1267,7 +1267,7 @@
             <c:bubble3D val="0"/>
             <c:spPr>
               <a:solidFill>
-                <a:srgbClr val="94A7B8"/>
+                <a:srgbClr val="8C887F"/>
               </a:solidFill>
               <a:effectLst/>
             </c:spPr>
@@ -1278,7 +1278,7 @@
             <c:bubble3D val="0"/>
             <c:spPr>
               <a:solidFill>
-                <a:srgbClr val="FF5A5A"/>
+                <a:srgbClr val="C8503F"/>
               </a:solidFill>
               <a:effectLst/>
             </c:spPr>
@@ -1289,7 +1289,7 @@
             <c:bubble3D val="0"/>
             <c:spPr>
               <a:solidFill>
-                <a:srgbClr val="3CE87C"/>
+                <a:srgbClr val="6AA84F"/>
               </a:solidFill>
               <a:effectLst/>
             </c:spPr>
@@ -1343,7 +1343,7 @@
               <a:pPr>
                 <a:defRPr b="0" i="0" strike="noStrike" sz="1100" u="none">
                   <a:solidFill>
-                    <a:srgbClr val="44525F"/>
+                    <a:srgbClr val="57534B"/>
                   </a:solidFill>
                   <a:latin typeface="+mn-lt"/>
                 </a:defRPr>
@@ -1391,7 +1391,7 @@
             <a:pPr>
               <a:defRPr sz="1100" b="0" i="0" u="none" strike="noStrike">
                 <a:solidFill>
-                  <a:srgbClr val="94A7B8"/>
+                  <a:srgbClr val="8C887F"/>
                 </a:solidFill>
                 <a:latin typeface="+mn-lt"/>
               </a:defRPr>
@@ -1418,7 +1418,7 @@
           <c:spPr>
             <a:ln w="12700" cap="flat">
               <a:solidFill>
-                <a:srgbClr val="DCE4EB"/>
+                <a:srgbClr val="D6D1C7"/>
               </a:solidFill>
               <a:prstDash val="solid"/>
               <a:round/>
@@ -1445,7 +1445,7 @@
             <a:pPr>
               <a:defRPr sz="1100" b="0" i="0" u="none" strike="noStrike">
                 <a:solidFill>
-                  <a:srgbClr val="94A7B8"/>
+                  <a:srgbClr val="8C887F"/>
                 </a:solidFill>
                 <a:latin typeface="+mn-lt"/>
               </a:defRPr>
@@ -3098,7 +3098,7 @@
     <p:bg>
       <p:bgPr>
         <a:solidFill>
-          <a:srgbClr val="0E1620"/>
+          <a:srgbClr val="16161A"/>
         </a:solidFill>
       </p:bgPr>
     </p:bg>
@@ -3181,7 +3181,7 @@
               <a:buNone/>
               <a:defRPr lang="en-US" sz="1700" dirty="0">
                 <a:solidFill>
-                  <a:srgbClr val="94A7B8"/>
+                  <a:srgbClr val="8C887F"/>
                 </a:solidFill>
               </a:defRPr>
             </a:lvl1pPr>
@@ -3208,7 +3208,7 @@
     <p:bg>
       <p:bgPr>
         <a:solidFill>
-          <a:srgbClr val="1B2A3A"/>
+          <a:srgbClr val="21222A"/>
         </a:solidFill>
       </p:bgPr>
     </p:bg>
@@ -3252,7 +3252,7 @@
               <a:buNone/>
               <a:defRPr lang="en-US" sz="3800" b="1" dirty="0">
                 <a:solidFill>
-                  <a:srgbClr val="FFB347"/>
+                  <a:srgbClr val="E8A33D"/>
                 </a:solidFill>
               </a:defRPr>
             </a:lvl1pPr>
@@ -3402,7 +3402,7 @@
             <a:r>
               <a:rPr lang="en-US" sz="1000" dirty="0">
                 <a:solidFill>
-                  <a:srgbClr val="94A7B8"/>
+                  <a:srgbClr val="8C887F"/>
                 </a:solidFill>
               </a:rPr>
               <a:t>SmartTraffic · Design of Smart Cities</a:t>
@@ -3441,7 +3441,7 @@
             <a:lvl1pPr>
               <a:defRPr sz="1000">
                 <a:solidFill>
-                  <a:srgbClr val="94A7B8"/>
+                  <a:srgbClr val="8C887F"/>
                 </a:solidFill>
               </a:defRPr>
             </a:lvl1pPr>
@@ -3470,7 +3470,7 @@
     <p:bg>
       <p:bgPr>
         <a:solidFill>
-          <a:srgbClr val="0E1620"/>
+          <a:srgbClr val="16161A"/>
         </a:solidFill>
       </p:bgPr>
     </p:bg>
@@ -3554,7 +3554,7 @@
             <a:r>
               <a:rPr lang="en-US" sz="1000" dirty="0">
                 <a:solidFill>
-                  <a:srgbClr val="94A7B8"/>
+                  <a:srgbClr val="8C887F"/>
                 </a:solidFill>
               </a:rPr>
               <a:t>SmartTraffic · Design of Smart Cities</a:t>
@@ -3593,7 +3593,7 @@
             <a:lvl1pPr>
               <a:defRPr sz="1000">
                 <a:solidFill>
-                  <a:srgbClr val="94A7B8"/>
+                  <a:srgbClr val="8C887F"/>
                 </a:solidFill>
               </a:defRPr>
             </a:lvl1pPr>
@@ -3663,7 +3663,7 @@
             <a:lvl1pPr>
               <a:defRPr sz="1000">
                 <a:solidFill>
-                  <a:srgbClr val="94A7B8"/>
+                  <a:srgbClr val="8C887F"/>
                 </a:solidFill>
               </a:defRPr>
             </a:lvl1pPr>
@@ -4026,7 +4026,7 @@
             <a:r>
               <a:rPr lang="en-US" sz="1700" dirty="0">
                 <a:solidFill>
-                  <a:srgbClr val="94A7B8"/>
+                  <a:srgbClr val="8C887F"/>
                 </a:solidFill>
               </a:rPr>
               <a:t>Adaptive signal control built for lane-less Indian traffic</a:t>
@@ -4040,7 +4040,7 @@
             <a:r>
               <a:rPr lang="en-US" sz="1300" dirty="0">
                 <a:solidFill>
-                  <a:srgbClr val="FFB347"/>
+                  <a:srgbClr val="E8A33D"/>
                 </a:solidFill>
               </a:rPr>
               <a:t>Design of Smart Cities   ·   15 controllers   ·   119 tests   ·   every claim reproducible</a:t>
@@ -4062,15 +4062,15 @@
           </a:xfrm>
           <a:prstGeom prst="roundRect">
             <a:avLst>
-              <a:gd name="adj" fmla="val 6957"/>
+              <a:gd name="adj" fmla="val 1739"/>
             </a:avLst>
           </a:prstGeom>
           <a:solidFill>
-            <a:srgbClr val="1B2A3A"/>
+            <a:srgbClr val="21222A"/>
           </a:solidFill>
           <a:ln w="12700">
             <a:solidFill>
-              <a:srgbClr val="1B2A3A"/>
+              <a:srgbClr val="21222A"/>
             </a:solidFill>
             <a:prstDash val="solid"/>
           </a:ln>
@@ -4114,7 +4114,7 @@
             <a:r>
               <a:rPr lang="en-US" sz="1500" dirty="0">
                 <a:solidFill>
-                  <a:srgbClr val="FFB347"/>
+                  <a:srgbClr val="E8A33D"/>
                 </a:solidFill>
               </a:rPr>
               <a:t>   24BCE5296</a:t>
@@ -4161,7 +4161,7 @@
             <a:r>
               <a:rPr lang="en-US" sz="1500" dirty="0">
                 <a:solidFill>
-                  <a:srgbClr val="FFB347"/>
+                  <a:srgbClr val="E8A33D"/>
                 </a:solidFill>
               </a:rPr>
               <a:t>   24BCE5255</a:t>
@@ -4183,11 +4183,11 @@
           </a:xfrm>
           <a:prstGeom prst="roundRect">
             <a:avLst>
-              <a:gd name="adj" fmla="val 7813"/>
+              <a:gd name="adj" fmla="val 2604"/>
             </a:avLst>
           </a:prstGeom>
           <a:solidFill>
-            <a:srgbClr val="09111A"/>
+            <a:srgbClr val="111115"/>
           </a:solidFill>
           <a:ln w="12700">
             <a:solidFill>
@@ -4212,11 +4212,11 @@
             <a:avLst/>
           </a:prstGeom>
           <a:solidFill>
-            <a:srgbClr val="1B2730"/>
+            <a:srgbClr val="26262C"/>
           </a:solidFill>
           <a:ln w="12700">
             <a:solidFill>
-              <a:srgbClr val="22303C"/>
+              <a:srgbClr val="2E2E34"/>
             </a:solidFill>
             <a:prstDash val="solid"/>
           </a:ln>
@@ -4237,11 +4237,11 @@
             <a:avLst/>
           </a:prstGeom>
           <a:solidFill>
-            <a:srgbClr val="1B2730"/>
+            <a:srgbClr val="26262C"/>
           </a:solidFill>
           <a:ln w="12700">
             <a:solidFill>
-              <a:srgbClr val="22303C"/>
+              <a:srgbClr val="2E2E34"/>
             </a:solidFill>
             <a:prstDash val="solid"/>
           </a:ln>
@@ -4262,11 +4262,11 @@
             <a:avLst/>
           </a:prstGeom>
           <a:solidFill>
-            <a:srgbClr val="3CE87C"/>
+            <a:srgbClr val="6AA84F"/>
           </a:solidFill>
           <a:ln w="12700">
             <a:solidFill>
-              <a:srgbClr val="3CE87C"/>
+              <a:srgbClr val="6AA84F"/>
             </a:solidFill>
             <a:prstDash val="solid"/>
           </a:ln>
@@ -4360,15 +4360,15 @@
           </a:xfrm>
           <a:prstGeom prst="roundRect">
             <a:avLst>
-              <a:gd name="adj" fmla="val 1818"/>
+              <a:gd name="adj" fmla="val 455"/>
             </a:avLst>
           </a:prstGeom>
           <a:solidFill>
-            <a:srgbClr val="EEF3F7"/>
+            <a:srgbClr val="E4E0D8"/>
           </a:solidFill>
           <a:ln w="12700">
             <a:solidFill>
-              <a:srgbClr val="EEF3F7"/>
+              <a:srgbClr val="E4E0D8"/>
             </a:solidFill>
             <a:prstDash val="solid"/>
           </a:ln>
@@ -4387,11 +4387,11 @@
           </a:xfrm>
           <a:prstGeom prst="roundRect">
             <a:avLst>
-              <a:gd name="adj" fmla="val 14706"/>
+              <a:gd name="adj" fmla="val 4902"/>
             </a:avLst>
           </a:prstGeom>
           <a:solidFill>
-            <a:srgbClr val="09111A"/>
+            <a:srgbClr val="111115"/>
           </a:solidFill>
           <a:ln w="12700">
             <a:solidFill>
@@ -4416,11 +4416,11 @@
             <a:avLst/>
           </a:prstGeom>
           <a:solidFill>
-            <a:srgbClr val="FF5A5A"/>
+            <a:srgbClr val="C8503F"/>
           </a:solidFill>
           <a:ln w="12700">
             <a:solidFill>
-              <a:srgbClr val="FF5A5A"/>
+              <a:srgbClr val="C8503F"/>
             </a:solidFill>
             <a:prstDash val="solid"/>
           </a:ln>
@@ -4441,11 +4441,11 @@
             <a:avLst/>
           </a:prstGeom>
           <a:solidFill>
-            <a:srgbClr val="1B2730"/>
+            <a:srgbClr val="26262C"/>
           </a:solidFill>
           <a:ln w="12700">
             <a:solidFill>
-              <a:srgbClr val="22303C"/>
+              <a:srgbClr val="2E2E34"/>
             </a:solidFill>
             <a:prstDash val="solid"/>
           </a:ln>
@@ -4466,11 +4466,11 @@
             <a:avLst/>
           </a:prstGeom>
           <a:solidFill>
-            <a:srgbClr val="1B2730"/>
+            <a:srgbClr val="26262C"/>
           </a:solidFill>
           <a:ln w="12700">
             <a:solidFill>
-              <a:srgbClr val="22303C"/>
+              <a:srgbClr val="2E2E34"/>
             </a:solidFill>
             <a:prstDash val="solid"/>
           </a:ln>
@@ -4581,15 +4581,15 @@
           </a:xfrm>
           <a:prstGeom prst="roundRect">
             <a:avLst>
-              <a:gd name="adj" fmla="val 1818"/>
+              <a:gd name="adj" fmla="val 455"/>
             </a:avLst>
           </a:prstGeom>
           <a:solidFill>
-            <a:srgbClr val="EEF3F7"/>
+            <a:srgbClr val="E4E0D8"/>
           </a:solidFill>
           <a:ln w="12700">
             <a:solidFill>
-              <a:srgbClr val="EEF3F7"/>
+              <a:srgbClr val="E4E0D8"/>
             </a:solidFill>
             <a:prstDash val="solid"/>
           </a:ln>
@@ -4608,11 +4608,11 @@
           </a:xfrm>
           <a:prstGeom prst="roundRect">
             <a:avLst>
-              <a:gd name="adj" fmla="val 14706"/>
+              <a:gd name="adj" fmla="val 4902"/>
             </a:avLst>
           </a:prstGeom>
           <a:solidFill>
-            <a:srgbClr val="09111A"/>
+            <a:srgbClr val="111115"/>
           </a:solidFill>
           <a:ln w="12700">
             <a:solidFill>
@@ -4637,11 +4637,11 @@
             <a:avLst/>
           </a:prstGeom>
           <a:solidFill>
-            <a:srgbClr val="FF5A5A"/>
+            <a:srgbClr val="C8503F"/>
           </a:solidFill>
           <a:ln w="12700">
             <a:solidFill>
-              <a:srgbClr val="FF5A5A"/>
+              <a:srgbClr val="C8503F"/>
             </a:solidFill>
             <a:prstDash val="solid"/>
           </a:ln>
@@ -4662,11 +4662,11 @@
             <a:avLst/>
           </a:prstGeom>
           <a:solidFill>
-            <a:srgbClr val="1B2730"/>
+            <a:srgbClr val="26262C"/>
           </a:solidFill>
           <a:ln w="12700">
             <a:solidFill>
-              <a:srgbClr val="22303C"/>
+              <a:srgbClr val="2E2E34"/>
             </a:solidFill>
             <a:prstDash val="solid"/>
           </a:ln>
@@ -4687,11 +4687,11 @@
             <a:avLst/>
           </a:prstGeom>
           <a:solidFill>
-            <a:srgbClr val="1B2730"/>
+            <a:srgbClr val="26262C"/>
           </a:solidFill>
           <a:ln w="12700">
             <a:solidFill>
-              <a:srgbClr val="22303C"/>
+              <a:srgbClr val="2E2E34"/>
             </a:solidFill>
             <a:prstDash val="solid"/>
           </a:ln>
@@ -4819,7 +4819,7 @@
             <a:lvl1pPr>
               <a:defRPr sz="1000">
                 <a:solidFill>
-                  <a:srgbClr val="94A7B8"/>
+                  <a:srgbClr val="8C887F"/>
                 </a:solidFill>
               </a:defRPr>
             </a:lvl1pPr>
@@ -4922,15 +4922,15 @@
           </a:xfrm>
           <a:prstGeom prst="roundRect">
             <a:avLst>
-              <a:gd name="adj" fmla="val 4000"/>
+              <a:gd name="adj" fmla="val 1000"/>
             </a:avLst>
           </a:prstGeom>
           <a:solidFill>
-            <a:srgbClr val="1B2A3A"/>
+            <a:srgbClr val="21222A"/>
           </a:solidFill>
           <a:ln w="12700">
             <a:solidFill>
-              <a:srgbClr val="1B2A3A"/>
+              <a:srgbClr val="21222A"/>
             </a:solidFill>
             <a:prstDash val="solid"/>
           </a:ln>
@@ -4951,11 +4951,11 @@
             <a:avLst/>
           </a:prstGeom>
           <a:solidFill>
-            <a:srgbClr val="3CE87C"/>
+            <a:srgbClr val="6AA84F"/>
           </a:solidFill>
           <a:ln w="12700">
             <a:solidFill>
-              <a:srgbClr val="3CE87C"/>
+              <a:srgbClr val="6AA84F"/>
             </a:solidFill>
             <a:prstDash val="solid"/>
           </a:ln>
@@ -5024,7 +5024,7 @@
             <a:r>
               <a:rPr lang="en-US" sz="1300" dirty="0">
                 <a:solidFill>
-                  <a:srgbClr val="94A7B8"/>
+                  <a:srgbClr val="8C887F"/>
                 </a:solidFill>
               </a:rPr>
               <a:t>Minimum green, starvation limits, a guaranteed maximum pedestrian wait. The optimiser proposes; the shield disposes.</a:t>
@@ -5046,15 +5046,15 @@
           </a:xfrm>
           <a:prstGeom prst="roundRect">
             <a:avLst>
-              <a:gd name="adj" fmla="val 4000"/>
+              <a:gd name="adj" fmla="val 1000"/>
             </a:avLst>
           </a:prstGeom>
           <a:solidFill>
-            <a:srgbClr val="1B2A3A"/>
+            <a:srgbClr val="21222A"/>
           </a:solidFill>
           <a:ln w="12700">
             <a:solidFill>
-              <a:srgbClr val="1B2A3A"/>
+              <a:srgbClr val="21222A"/>
             </a:solidFill>
             <a:prstDash val="solid"/>
           </a:ln>
@@ -5075,11 +5075,11 @@
             <a:avLst/>
           </a:prstGeom>
           <a:solidFill>
-            <a:srgbClr val="FFB347"/>
+            <a:srgbClr val="E8A33D"/>
           </a:solidFill>
           <a:ln w="12700">
             <a:solidFill>
-              <a:srgbClr val="FFB347"/>
+              <a:srgbClr val="E8A33D"/>
             </a:solidFill>
             <a:prstDash val="solid"/>
           </a:ln>
@@ -5148,7 +5148,7 @@
             <a:r>
               <a:rPr lang="en-US" sz="1300" dirty="0">
                 <a:solidFill>
-                  <a:srgbClr val="94A7B8"/>
+                  <a:srgbClr val="8C887F"/>
                 </a:solidFill>
               </a:rPr>
               <a:t>Kill a detector, drop comms, fail a signal head — each routes to a documented fallback and the UI says which.</a:t>
@@ -5170,15 +5170,15 @@
           </a:xfrm>
           <a:prstGeom prst="roundRect">
             <a:avLst>
-              <a:gd name="adj" fmla="val 4000"/>
+              <a:gd name="adj" fmla="val 1000"/>
             </a:avLst>
           </a:prstGeom>
           <a:solidFill>
-            <a:srgbClr val="1B2A3A"/>
+            <a:srgbClr val="21222A"/>
           </a:solidFill>
           <a:ln w="12700">
             <a:solidFill>
-              <a:srgbClr val="1B2A3A"/>
+              <a:srgbClr val="21222A"/>
             </a:solidFill>
             <a:prstDash val="solid"/>
           </a:ln>
@@ -5199,11 +5199,11 @@
             <a:avLst/>
           </a:prstGeom>
           <a:solidFill>
-            <a:srgbClr val="8FD8FF"/>
+            <a:srgbClr val="A8A398"/>
           </a:solidFill>
           <a:ln w="12700">
             <a:solidFill>
-              <a:srgbClr val="8FD8FF"/>
+              <a:srgbClr val="A8A398"/>
             </a:solidFill>
             <a:prstDash val="solid"/>
           </a:ln>
@@ -5272,7 +5272,7 @@
             <a:r>
               <a:rPr lang="en-US" sz="1300" dirty="0">
                 <a:solidFill>
-                  <a:srgbClr val="94A7B8"/>
+                  <a:srgbClr val="8C887F"/>
                 </a:solidFill>
               </a:rPr>
               <a:t>Every phase change is logged with the pressures behind it and the constraint that overrode the optimiser.</a:t>
@@ -5294,15 +5294,15 @@
           </a:xfrm>
           <a:prstGeom prst="roundRect">
             <a:avLst>
-              <a:gd name="adj" fmla="val 4000"/>
+              <a:gd name="adj" fmla="val 1000"/>
             </a:avLst>
           </a:prstGeom>
           <a:solidFill>
-            <a:srgbClr val="1B2A3A"/>
+            <a:srgbClr val="21222A"/>
           </a:solidFill>
           <a:ln w="12700">
             <a:solidFill>
-              <a:srgbClr val="1B2A3A"/>
+              <a:srgbClr val="21222A"/>
             </a:solidFill>
             <a:prstDash val="solid"/>
           </a:ln>
@@ -5323,11 +5323,11 @@
             <a:avLst/>
           </a:prstGeom>
           <a:solidFill>
-            <a:srgbClr val="C9A227"/>
+            <a:srgbClr val="B0883C"/>
           </a:solidFill>
           <a:ln w="12700">
             <a:solidFill>
-              <a:srgbClr val="C9A227"/>
+              <a:srgbClr val="B0883C"/>
             </a:solidFill>
             <a:prstDash val="solid"/>
           </a:ln>
@@ -5396,7 +5396,7 @@
             <a:r>
               <a:rPr lang="en-US" sz="1300" dirty="0">
                 <a:solidFill>
-                  <a:srgbClr val="94A7B8"/>
+                  <a:srgbClr val="8C887F"/>
                 </a:solidFill>
               </a:rPr>
               <a:t>Idle fuel, CO₂ and rupees per year, with every assumption listed and challengeable.</a:t>
@@ -5435,7 +5435,7 @@
             <a:lvl1pPr>
               <a:defRPr sz="1000">
                 <a:solidFill>
-                  <a:srgbClr val="94A7B8"/>
+                  <a:srgbClr val="8C887F"/>
                 </a:solidFill>
               </a:defRPr>
             </a:lvl1pPr>
@@ -5538,15 +5538,15 @@
           </a:xfrm>
           <a:prstGeom prst="roundRect">
             <a:avLst>
-              <a:gd name="adj" fmla="val 5333"/>
+              <a:gd name="adj" fmla="val 1333"/>
             </a:avLst>
           </a:prstGeom>
           <a:solidFill>
-            <a:srgbClr val="0E1620"/>
+            <a:srgbClr val="16161A"/>
           </a:solidFill>
           <a:ln w="12700">
             <a:solidFill>
-              <a:srgbClr val="0E1620"/>
+              <a:srgbClr val="16161A"/>
             </a:solidFill>
             <a:prstDash val="solid"/>
           </a:ln>
@@ -5579,11 +5579,11 @@
             <a:r>
               <a:rPr lang="en-US" sz="2000" b="1" dirty="0">
                 <a:solidFill>
-                  <a:srgbClr val="3CE87C"/>
-                </a:solidFill>
-                <a:latin typeface="Courier New" pitchFamily="34" charset="0"/>
-                <a:ea typeface="Courier New" pitchFamily="34" charset="-122"/>
-                <a:cs typeface="Courier New" pitchFamily="34" charset="-120"/>
+                  <a:srgbClr val="6AA84F"/>
+                </a:solidFill>
+                <a:latin typeface="Consolas" pitchFamily="34" charset="0"/>
+                <a:ea typeface="Consolas" pitchFamily="34" charset="-122"/>
+                <a:cs typeface="Consolas" pitchFamily="34" charset="-120"/>
               </a:rPr>
               <a:t>python scripts/reproduce_results.py</a:t>
             </a:r>
@@ -5618,7 +5618,7 @@
             <a:r>
               <a:rPr lang="en-US" sz="1400" dirty="0">
                 <a:solidFill>
-                  <a:srgbClr val="94A7B8"/>
+                  <a:srgbClr val="8C887F"/>
                 </a:solidFill>
               </a:rPr>
               <a:t>Re-measures every documented claim and exits non-zero if one has stopped being true.</a:t>
@@ -5654,7 +5654,7 @@
             <a:r>
               <a:rPr lang="en-US" sz="4800" b="1" dirty="0">
                 <a:solidFill>
-                  <a:srgbClr val="3CE87C"/>
+                  <a:srgbClr val="6AA84F"/>
                 </a:solidFill>
               </a:rPr>
               <a:t>10/10</a:t>
@@ -5798,7 +5798,7 @@
             <a:r>
               <a:rPr lang="en-US" sz="4800" b="1" dirty="0">
                 <a:solidFill>
-                  <a:srgbClr val="FFB347"/>
+                  <a:srgbClr val="E8A33D"/>
                 </a:solidFill>
               </a:rPr>
               <a:t>CI</a:t>
@@ -5856,15 +5856,15 @@
           </a:xfrm>
           <a:prstGeom prst="roundRect">
             <a:avLst>
-              <a:gd name="adj" fmla="val 5333"/>
+              <a:gd name="adj" fmla="val 1333"/>
             </a:avLst>
           </a:prstGeom>
           <a:solidFill>
-            <a:srgbClr val="EEF3F7"/>
+            <a:srgbClr val="E4E0D8"/>
           </a:solidFill>
           <a:ln w="12700">
             <a:solidFill>
-              <a:srgbClr val="EEF3F7"/>
+              <a:srgbClr val="E4E0D8"/>
             </a:solidFill>
             <a:prstDash val="solid"/>
           </a:ln>
@@ -5972,7 +5972,7 @@
             <a:lvl1pPr>
               <a:defRPr sz="1000">
                 <a:solidFill>
-                  <a:srgbClr val="94A7B8"/>
+                  <a:srgbClr val="8C887F"/>
                 </a:solidFill>
               </a:defRPr>
             </a:lvl1pPr>
@@ -6075,15 +6075,15 @@
           </a:xfrm>
           <a:prstGeom prst="roundRect">
             <a:avLst>
-              <a:gd name="adj" fmla="val 7273"/>
+              <a:gd name="adj" fmla="val 1818"/>
             </a:avLst>
           </a:prstGeom>
           <a:solidFill>
-            <a:srgbClr val="1B2A3A"/>
+            <a:srgbClr val="21222A"/>
           </a:solidFill>
           <a:ln w="12700">
             <a:solidFill>
-              <a:srgbClr val="1B2A3A"/>
+              <a:srgbClr val="21222A"/>
             </a:solidFill>
             <a:prstDash val="solid"/>
           </a:ln>
@@ -6116,7 +6116,7 @@
             <a:r>
               <a:rPr lang="en-US" sz="1500" b="1" dirty="0">
                 <a:solidFill>
-                  <a:srgbClr val="FFB347"/>
+                  <a:srgbClr val="E8A33D"/>
                 </a:solidFill>
               </a:rPr>
               <a:t>Parameters are estimates, not measurements</a:t>
@@ -6152,7 +6152,7 @@
             <a:r>
               <a:rPr lang="en-US" sz="1300" dirty="0">
                 <a:solidFill>
-                  <a:srgbClr val="94A7B8"/>
+                  <a:srgbClr val="8C887F"/>
                 </a:solidFill>
               </a:rPr>
               <a:t>Lateral widths and headways are centre estimates. Calibrating them needs stop-line video from a real junction, which we have not done.</a:t>
@@ -6174,15 +6174,15 @@
           </a:xfrm>
           <a:prstGeom prst="roundRect">
             <a:avLst>
-              <a:gd name="adj" fmla="val 7273"/>
+              <a:gd name="adj" fmla="val 1818"/>
             </a:avLst>
           </a:prstGeom>
           <a:solidFill>
-            <a:srgbClr val="1B2A3A"/>
+            <a:srgbClr val="21222A"/>
           </a:solidFill>
           <a:ln w="12700">
             <a:solidFill>
-              <a:srgbClr val="1B2A3A"/>
+              <a:srgbClr val="21222A"/>
             </a:solidFill>
             <a:prstDash val="solid"/>
           </a:ln>
@@ -6215,7 +6215,7 @@
             <a:r>
               <a:rPr lang="en-US" sz="1500" b="1" dirty="0">
                 <a:solidFill>
-                  <a:srgbClr val="FFB347"/>
+                  <a:srgbClr val="E8A33D"/>
                 </a:solidFill>
               </a:rPr>
               <a:t>It trades vehicles for people</a:t>
@@ -6251,7 +6251,7 @@
             <a:r>
               <a:rPr lang="en-US" sz="1300" dirty="0">
                 <a:solidFill>
-                  <a:srgbClr val="94A7B8"/>
+                  <a:srgbClr val="8C887F"/>
                 </a:solidFill>
               </a:rPr>
               <a:t>About 1,800 fewer vehicles move while 1,900 more people do. Whether a city wants that is a policy decision, not a technical result.</a:t>
@@ -6273,15 +6273,15 @@
           </a:xfrm>
           <a:prstGeom prst="roundRect">
             <a:avLst>
-              <a:gd name="adj" fmla="val 7273"/>
+              <a:gd name="adj" fmla="val 1818"/>
             </a:avLst>
           </a:prstGeom>
           <a:solidFill>
-            <a:srgbClr val="1B2A3A"/>
+            <a:srgbClr val="21222A"/>
           </a:solidFill>
           <a:ln w="12700">
             <a:solidFill>
-              <a:srgbClr val="1B2A3A"/>
+              <a:srgbClr val="21222A"/>
             </a:solidFill>
             <a:prstDash val="solid"/>
           </a:ln>
@@ -6314,7 +6314,7 @@
             <a:r>
               <a:rPr lang="en-US" sz="1500" b="1" dirty="0">
                 <a:solidFill>
-                  <a:srgbClr val="FFB347"/>
+                  <a:srgbClr val="E8A33D"/>
                 </a:solidFill>
               </a:rPr>
               <a:t>It loses where traffic is uniform</a:t>
@@ -6350,7 +6350,7 @@
             <a:r>
               <a:rPr lang="en-US" sz="1300" dirty="0">
                 <a:solidFill>
-                  <a:srgbClr val="94A7B8"/>
+                  <a:srgbClr val="8C887F"/>
                 </a:solidFill>
               </a:rPr>
               <a:t>With every road carrying the same mix it is measurably behind the conventional controller. It pays only when roads differ and green is scarce.</a:t>
@@ -6372,15 +6372,15 @@
           </a:xfrm>
           <a:prstGeom prst="roundRect">
             <a:avLst>
-              <a:gd name="adj" fmla="val 7273"/>
+              <a:gd name="adj" fmla="val 1818"/>
             </a:avLst>
           </a:prstGeom>
           <a:solidFill>
-            <a:srgbClr val="1B2A3A"/>
+            <a:srgbClr val="21222A"/>
           </a:solidFill>
           <a:ln w="12700">
             <a:solidFill>
-              <a:srgbClr val="1B2A3A"/>
+              <a:srgbClr val="21222A"/>
             </a:solidFill>
             <a:prstDash val="solid"/>
           </a:ln>
@@ -6413,7 +6413,7 @@
             <a:r>
               <a:rPr lang="en-US" sz="1500" b="1" dirty="0">
                 <a:solidFill>
-                  <a:srgbClr val="FFB347"/>
+                  <a:srgbClr val="E8A33D"/>
                 </a:solidFill>
               </a:rPr>
               <a:t>The engine is not a traffic simulator</a:t>
@@ -6449,7 +6449,7 @@
             <a:r>
               <a:rPr lang="en-US" sz="1300" dirty="0">
                 <a:solidFill>
-                  <a:srgbClr val="94A7B8"/>
+                  <a:srgbClr val="8C887F"/>
                 </a:solidFill>
               </a:rPr>
               <a:t>Final performance claims must be regenerated in SUMO with a heterogeneous vehicle set.</a:t>
@@ -6488,7 +6488,7 @@
             <a:lvl1pPr>
               <a:defRPr sz="1000">
                 <a:solidFill>
-                  <a:srgbClr val="94A7B8"/>
+                  <a:srgbClr val="8C887F"/>
                 </a:solidFill>
               </a:defRPr>
             </a:lvl1pPr>
@@ -6607,7 +6607,7 @@
             <a:r>
               <a:rPr lang="en-US" sz="1700" dirty="0">
                 <a:solidFill>
-                  <a:srgbClr val="94A7B8"/>
+                  <a:srgbClr val="8C887F"/>
                 </a:solidFill>
               </a:rPr>
               <a:t>Control theory imported from the West assumes lane discipline. We modelled lane-less traffic from physics, showed the standard method mis-allocates green by 21%, and fixed the equity problem that correction created.</a:t>
@@ -6621,7 +6621,7 @@
             <a:r>
               <a:rPr lang="en-US" sz="1300" dirty="0">
                 <a:solidFill>
-                  <a:srgbClr val="FFB347"/>
+                  <a:srgbClr val="E8A33D"/>
                 </a:solidFill>
               </a:rPr>
               <a:t>Every figure re-runs with one command — including the ones that went against us.</a:t>
@@ -6643,11 +6643,11 @@
           </a:xfrm>
           <a:prstGeom prst="roundRect">
             <a:avLst>
-              <a:gd name="adj" fmla="val 7813"/>
+              <a:gd name="adj" fmla="val 2604"/>
             </a:avLst>
           </a:prstGeom>
           <a:solidFill>
-            <a:srgbClr val="09111A"/>
+            <a:srgbClr val="111115"/>
           </a:solidFill>
           <a:ln w="12700">
             <a:solidFill>
@@ -6672,11 +6672,11 @@
             <a:avLst/>
           </a:prstGeom>
           <a:solidFill>
-            <a:srgbClr val="1B2730"/>
+            <a:srgbClr val="26262C"/>
           </a:solidFill>
           <a:ln w="12700">
             <a:solidFill>
-              <a:srgbClr val="22303C"/>
+              <a:srgbClr val="2E2E34"/>
             </a:solidFill>
             <a:prstDash val="solid"/>
           </a:ln>
@@ -6697,11 +6697,11 @@
             <a:avLst/>
           </a:prstGeom>
           <a:solidFill>
-            <a:srgbClr val="1B2730"/>
+            <a:srgbClr val="26262C"/>
           </a:solidFill>
           <a:ln w="12700">
             <a:solidFill>
-              <a:srgbClr val="22303C"/>
+              <a:srgbClr val="2E2E34"/>
             </a:solidFill>
             <a:prstDash val="solid"/>
           </a:ln>
@@ -6722,11 +6722,11 @@
             <a:avLst/>
           </a:prstGeom>
           <a:solidFill>
-            <a:srgbClr val="3CE87C"/>
+            <a:srgbClr val="6AA84F"/>
           </a:solidFill>
           <a:ln w="12700">
             <a:solidFill>
-              <a:srgbClr val="3CE87C"/>
+              <a:srgbClr val="6AA84F"/>
             </a:solidFill>
             <a:prstDash val="solid"/>
           </a:ln>
@@ -6834,7 +6834,7 @@
             <a:r>
               <a:rPr lang="en-US" sz="4800" b="1" dirty="0">
                 <a:solidFill>
-                  <a:srgbClr val="FF5A5A"/>
+                  <a:srgbClr val="C8503F"/>
                 </a:solidFill>
               </a:rPr>
               <a:t>31:15</a:t>
@@ -6906,7 +6906,7 @@
             <a:r>
               <a:rPr lang="en-US" sz="1000" i="1" dirty="0">
                 <a:solidFill>
-                  <a:srgbClr val="94A7B8"/>
+                  <a:srgbClr val="8C887F"/>
                 </a:solidFill>
               </a:rPr>
               <a:t>TomTom Traffic Index 2025</a:t>
@@ -6942,7 +6942,7 @@
             <a:r>
               <a:rPr lang="en-US" sz="4800" b="1" dirty="0">
                 <a:solidFill>
-                  <a:srgbClr val="FF5A5A"/>
+                  <a:srgbClr val="C8503F"/>
                 </a:solidFill>
               </a:rPr>
               <a:t>100.9%</a:t>
@@ -7014,7 +7014,7 @@
             <a:r>
               <a:rPr lang="en-US" sz="1000" i="1" dirty="0">
                 <a:solidFill>
-                  <a:srgbClr val="94A7B8"/>
+                  <a:srgbClr val="8C887F"/>
                 </a:solidFill>
               </a:rPr>
               <a:t>a trip takes twice free-flow</a:t>
@@ -7050,7 +7050,7 @@
             <a:r>
               <a:rPr lang="en-US" sz="4800" b="1" dirty="0">
                 <a:solidFill>
-                  <a:srgbClr val="FF5A5A"/>
+                  <a:srgbClr val="C8503F"/>
                 </a:solidFill>
               </a:rPr>
               <a:t>16 km/h</a:t>
@@ -7122,7 +7122,7 @@
             <a:r>
               <a:rPr lang="en-US" sz="1000" i="1" dirty="0">
                 <a:solidFill>
-                  <a:srgbClr val="94A7B8"/>
+                  <a:srgbClr val="8C887F"/>
                 </a:solidFill>
               </a:rPr>
               <a:t>slower than a bicycle downhill</a:t>
@@ -7144,15 +7144,15 @@
           </a:xfrm>
           <a:prstGeom prst="roundRect">
             <a:avLst>
-              <a:gd name="adj" fmla="val 4103"/>
+              <a:gd name="adj" fmla="val 1026"/>
             </a:avLst>
           </a:prstGeom>
           <a:solidFill>
-            <a:srgbClr val="EEF3F7"/>
+            <a:srgbClr val="E4E0D8"/>
           </a:solidFill>
           <a:ln w="12700">
             <a:solidFill>
-              <a:srgbClr val="EEF3F7"/>
+              <a:srgbClr val="E4E0D8"/>
             </a:solidFill>
             <a:prstDash val="solid"/>
           </a:ln>
@@ -7260,7 +7260,7 @@
             <a:lvl1pPr>
               <a:defRPr sz="1000">
                 <a:solidFill>
-                  <a:srgbClr val="94A7B8"/>
+                  <a:srgbClr val="8C887F"/>
                 </a:solidFill>
               </a:defRPr>
             </a:lvl1pPr>
@@ -7363,15 +7363,15 @@
           </a:xfrm>
           <a:prstGeom prst="roundRect">
             <a:avLst>
-              <a:gd name="adj" fmla="val 1739"/>
+              <a:gd name="adj" fmla="val 435"/>
             </a:avLst>
           </a:prstGeom>
           <a:solidFill>
-            <a:srgbClr val="1B2A3A"/>
+            <a:srgbClr val="21222A"/>
           </a:solidFill>
           <a:ln w="12700">
             <a:solidFill>
-              <a:srgbClr val="1B2A3A"/>
+              <a:srgbClr val="21222A"/>
             </a:solidFill>
             <a:prstDash val="solid"/>
           </a:ln>
@@ -7404,7 +7404,7 @@
             <a:r>
               <a:rPr lang="en-US" sz="1600" b="1" dirty="0">
                 <a:solidFill>
-                  <a:srgbClr val="94A7B8"/>
+                  <a:srgbClr val="8C887F"/>
                 </a:solidFill>
               </a:rPr>
               <a:t>Established work — implemented, not claimed</a:t>
@@ -7556,15 +7556,15 @@
           </a:xfrm>
           <a:prstGeom prst="roundRect">
             <a:avLst>
-              <a:gd name="adj" fmla="val 1739"/>
+              <a:gd name="adj" fmla="val 435"/>
             </a:avLst>
           </a:prstGeom>
           <a:solidFill>
-            <a:srgbClr val="2A2015"/>
+            <a:srgbClr val="2A2114"/>
           </a:solidFill>
           <a:ln w="12700">
             <a:solidFill>
-              <a:srgbClr val="2A2015"/>
+              <a:srgbClr val="2A2114"/>
             </a:solidFill>
             <a:prstDash val="solid"/>
           </a:ln>
@@ -7597,7 +7597,7 @@
             <a:r>
               <a:rPr lang="en-US" sz="1600" b="1" dirty="0">
                 <a:solidFill>
-                  <a:srgbClr val="FFB347"/>
+                  <a:srgbClr val="E8A33D"/>
                 </a:solidFill>
               </a:rPr>
               <a:t>Ours</a:t>
@@ -7712,7 +7712,7 @@
             <a:lvl1pPr>
               <a:defRPr sz="1000">
                 <a:solidFill>
-                  <a:srgbClr val="94A7B8"/>
+                  <a:srgbClr val="8C887F"/>
                 </a:solidFill>
               </a:defRPr>
             </a:lvl1pPr>
@@ -7793,7 +7793,7 @@
             <a:r>
               <a:rPr lang="en-US" sz="3800" b="1" dirty="0">
                 <a:solidFill>
-                  <a:srgbClr val="FFB347"/>
+                  <a:srgbClr val="E8A33D"/>
                 </a:solidFill>
               </a:rPr>
               <a:t>Signal theory assumes lane discipline</a:t>
@@ -7944,15 +7944,15 @@
           </a:xfrm>
           <a:prstGeom prst="roundRect">
             <a:avLst>
-              <a:gd name="adj" fmla="val 1860"/>
+              <a:gd name="adj" fmla="val 465"/>
             </a:avLst>
           </a:prstGeom>
           <a:solidFill>
-            <a:srgbClr val="EEF3F7"/>
+            <a:srgbClr val="E4E0D8"/>
           </a:solidFill>
           <a:ln w="12700">
             <a:solidFill>
-              <a:srgbClr val="EEF3F7"/>
+              <a:srgbClr val="E4E0D8"/>
             </a:solidFill>
             <a:prstDash val="solid"/>
           </a:ln>
@@ -7985,7 +7985,7 @@
             <a:r>
               <a:rPr lang="en-US" sz="5400" b="1" dirty="0">
                 <a:solidFill>
-                  <a:srgbClr val="FF5A5A"/>
+                  <a:srgbClr val="C8503F"/>
                 </a:solidFill>
               </a:rPr>
               <a:t>56%</a:t>
@@ -8116,7 +8116,7 @@
             <a:lvl1pPr>
               <a:defRPr sz="1000">
                 <a:solidFill>
-                  <a:srgbClr val="94A7B8"/>
+                  <a:srgbClr val="8C887F"/>
                 </a:solidFill>
               </a:defRPr>
             </a:lvl1pPr>
@@ -8307,15 +8307,15 @@
           </a:xfrm>
           <a:prstGeom prst="roundRect">
             <a:avLst>
-              <a:gd name="adj" fmla="val 4571"/>
+              <a:gd name="adj" fmla="val 1143"/>
             </a:avLst>
           </a:prstGeom>
           <a:solidFill>
-            <a:srgbClr val="EEF3F7"/>
+            <a:srgbClr val="E4E0D8"/>
           </a:solidFill>
           <a:ln w="12700">
             <a:solidFill>
-              <a:srgbClr val="EEF3F7"/>
+              <a:srgbClr val="E4E0D8"/>
             </a:solidFill>
             <a:prstDash val="solid"/>
           </a:ln>
@@ -8423,7 +8423,7 @@
             <a:lvl1pPr>
               <a:defRPr sz="1000">
                 <a:solidFill>
-                  <a:srgbClr val="94A7B8"/>
+                  <a:srgbClr val="8C887F"/>
                 </a:solidFill>
               </a:defRPr>
             </a:lvl1pPr>
@@ -8526,15 +8526,15 @@
           </a:xfrm>
           <a:prstGeom prst="roundRect">
             <a:avLst>
-              <a:gd name="adj" fmla="val 7619"/>
+              <a:gd name="adj" fmla="val 1905"/>
             </a:avLst>
           </a:prstGeom>
           <a:solidFill>
-            <a:srgbClr val="1B2A3A"/>
+            <a:srgbClr val="21222A"/>
           </a:solidFill>
           <a:ln w="12700">
             <a:solidFill>
-              <a:srgbClr val="1B2A3A"/>
+              <a:srgbClr val="21222A"/>
             </a:solidFill>
             <a:prstDash val="solid"/>
           </a:ln>
@@ -8555,11 +8555,11 @@
             <a:avLst/>
           </a:prstGeom>
           <a:solidFill>
-            <a:srgbClr val="FF5A5A"/>
+            <a:srgbClr val="C8503F"/>
           </a:solidFill>
           <a:ln w="12700">
             <a:solidFill>
-              <a:srgbClr val="FF5A5A"/>
+              <a:srgbClr val="C8503F"/>
             </a:solidFill>
             <a:prstDash val="solid"/>
           </a:ln>
@@ -8592,7 +8592,7 @@
             <a:r>
               <a:rPr lang="en-US" sz="1800" b="1" dirty="0">
                 <a:solidFill>
-                  <a:srgbClr val="0E1620"/>
+                  <a:srgbClr val="16161A"/>
                 </a:solidFill>
               </a:rPr>
               <a:t>1</a:t>
@@ -8664,7 +8664,7 @@
             <a:r>
               <a:rPr lang="en-US" sz="1300" dirty="0">
                 <a:solidFill>
-                  <a:srgbClr val="94A7B8"/>
+                  <a:srgbClr val="8C887F"/>
                 </a:solidFill>
               </a:rPr>
               <a:t>No effect. The bias applied equally to both roads, so it cancelled.</a:t>
@@ -8686,15 +8686,15 @@
           </a:xfrm>
           <a:prstGeom prst="roundRect">
             <a:avLst>
-              <a:gd name="adj" fmla="val 7619"/>
+              <a:gd name="adj" fmla="val 1905"/>
             </a:avLst>
           </a:prstGeom>
           <a:solidFill>
-            <a:srgbClr val="1B2A3A"/>
+            <a:srgbClr val="21222A"/>
           </a:solidFill>
           <a:ln w="12700">
             <a:solidFill>
-              <a:srgbClr val="1B2A3A"/>
+              <a:srgbClr val="21222A"/>
             </a:solidFill>
             <a:prstDash val="solid"/>
           </a:ln>
@@ -8715,11 +8715,11 @@
             <a:avLst/>
           </a:prstGeom>
           <a:solidFill>
-            <a:srgbClr val="FF5A5A"/>
+            <a:srgbClr val="C8503F"/>
           </a:solidFill>
           <a:ln w="12700">
             <a:solidFill>
-              <a:srgbClr val="FF5A5A"/>
+              <a:srgbClr val="C8503F"/>
             </a:solidFill>
             <a:prstDash val="solid"/>
           </a:ln>
@@ -8752,7 +8752,7 @@
             <a:r>
               <a:rPr lang="en-US" sz="1800" b="1" dirty="0">
                 <a:solidFill>
-                  <a:srgbClr val="0E1620"/>
+                  <a:srgbClr val="16161A"/>
                 </a:solidFill>
               </a:rPr>
               <a:t>2</a:t>
@@ -8824,7 +8824,7 @@
             <a:r>
               <a:rPr lang="en-US" sz="1300" dirty="0">
                 <a:solidFill>
-                  <a:srgbClr val="94A7B8"/>
+                  <a:srgbClr val="8C887F"/>
                 </a:solidFill>
               </a:rPr>
               <a:t>Still almost nothing. Only blocked arrivals moved, barely.</a:t>
@@ -8846,15 +8846,15 @@
           </a:xfrm>
           <a:prstGeom prst="roundRect">
             <a:avLst>
-              <a:gd name="adj" fmla="val 7619"/>
+              <a:gd name="adj" fmla="val 1905"/>
             </a:avLst>
           </a:prstGeom>
           <a:solidFill>
-            <a:srgbClr val="1B2A3A"/>
+            <a:srgbClr val="21222A"/>
           </a:solidFill>
           <a:ln w="12700">
             <a:solidFill>
-              <a:srgbClr val="1B2A3A"/>
+              <a:srgbClr val="21222A"/>
             </a:solidFill>
             <a:prstDash val="solid"/>
           </a:ln>
@@ -8875,11 +8875,11 @@
             <a:avLst/>
           </a:prstGeom>
           <a:solidFill>
-            <a:srgbClr val="FFB347"/>
+            <a:srgbClr val="E8A33D"/>
           </a:solidFill>
           <a:ln w="12700">
             <a:solidFill>
-              <a:srgbClr val="FFB347"/>
+              <a:srgbClr val="E8A33D"/>
             </a:solidFill>
             <a:prstDash val="solid"/>
           </a:ln>
@@ -8912,7 +8912,7 @@
             <a:r>
               <a:rPr lang="en-US" sz="1800" b="1" dirty="0">
                 <a:solidFill>
-                  <a:srgbClr val="0E1620"/>
+                  <a:srgbClr val="16161A"/>
                 </a:solidFill>
               </a:rPr>
               <a:t>3</a:t>
@@ -8984,7 +8984,7 @@
             <a:r>
               <a:rPr lang="en-US" sz="1300" dirty="0">
                 <a:solidFill>
-                  <a:srgbClr val="94A7B8"/>
+                  <a:srgbClr val="8C887F"/>
                 </a:solidFill>
               </a:rPr>
               <a:t>Controllers agreed 85% of the time. Green was not scarce, so allocating it badly cost nothing.</a:t>
@@ -9006,15 +9006,15 @@
           </a:xfrm>
           <a:prstGeom prst="roundRect">
             <a:avLst>
-              <a:gd name="adj" fmla="val 7619"/>
+              <a:gd name="adj" fmla="val 1905"/>
             </a:avLst>
           </a:prstGeom>
           <a:solidFill>
-            <a:srgbClr val="13301F"/>
+            <a:srgbClr val="1C2418"/>
           </a:solidFill>
           <a:ln w="12700">
             <a:solidFill>
-              <a:srgbClr val="13301F"/>
+              <a:srgbClr val="1C2418"/>
             </a:solidFill>
             <a:prstDash val="solid"/>
           </a:ln>
@@ -9035,11 +9035,11 @@
             <a:avLst/>
           </a:prstGeom>
           <a:solidFill>
-            <a:srgbClr val="3CE87C"/>
+            <a:srgbClr val="6AA84F"/>
           </a:solidFill>
           <a:ln w="12700">
             <a:solidFill>
-              <a:srgbClr val="3CE87C"/>
+              <a:srgbClr val="6AA84F"/>
             </a:solidFill>
             <a:prstDash val="solid"/>
           </a:ln>
@@ -9072,7 +9072,7 @@
             <a:r>
               <a:rPr lang="en-US" sz="1800" b="1" dirty="0">
                 <a:solidFill>
-                  <a:srgbClr val="0E1620"/>
+                  <a:srgbClr val="16161A"/>
                 </a:solidFill>
               </a:rPr>
               <a:t>4</a:t>
@@ -9144,7 +9144,7 @@
             <a:r>
               <a:rPr lang="en-US" sz="1300" dirty="0">
                 <a:solidFill>
-                  <a:srgbClr val="94A7B8"/>
+                  <a:srgbClr val="8C887F"/>
                 </a:solidFill>
               </a:rPr>
               <a:t>It worked. Choosing which road is binary; how long is where a bad measure costs you.</a:t>
@@ -9183,7 +9183,7 @@
             <a:lvl1pPr>
               <a:defRPr sz="1000">
                 <a:solidFill>
-                  <a:srgbClr val="94A7B8"/>
+                  <a:srgbClr val="8C887F"/>
                 </a:solidFill>
               </a:defRPr>
             </a:lvl1pPr>
@@ -9371,7 +9371,7 @@
             <a:lvl1pPr>
               <a:defRPr sz="1000">
                 <a:solidFill>
-                  <a:srgbClr val="94A7B8"/>
+                  <a:srgbClr val="8C887F"/>
                 </a:solidFill>
               </a:defRPr>
             </a:lvl1pPr>
@@ -9474,15 +9474,15 @@
           </a:xfrm>
           <a:prstGeom prst="roundRect">
             <a:avLst>
-              <a:gd name="adj" fmla="val 1860"/>
+              <a:gd name="adj" fmla="val 465"/>
             </a:avLst>
           </a:prstGeom>
           <a:solidFill>
-            <a:srgbClr val="2A1518"/>
+            <a:srgbClr val="2B1A17"/>
           </a:solidFill>
           <a:ln w="12700">
             <a:solidFill>
-              <a:srgbClr val="2A1518"/>
+              <a:srgbClr val="2B1A17"/>
             </a:solidFill>
             <a:prstDash val="solid"/>
           </a:ln>
@@ -9515,7 +9515,7 @@
             <a:r>
               <a:rPr lang="en-US" sz="1700" b="1" dirty="0">
                 <a:solidFill>
-                  <a:srgbClr val="FF5A5A"/>
+                  <a:srgbClr val="C8503F"/>
                 </a:solidFill>
               </a:rPr>
               <a:t>The problem</a:t>
@@ -9593,15 +9593,15 @@
           </a:xfrm>
           <a:prstGeom prst="roundRect">
             <a:avLst>
-              <a:gd name="adj" fmla="val 1860"/>
+              <a:gd name="adj" fmla="val 465"/>
             </a:avLst>
           </a:prstGeom>
           <a:solidFill>
-            <a:srgbClr val="13301F"/>
+            <a:srgbClr val="1C2418"/>
           </a:solidFill>
           <a:ln w="12700">
             <a:solidFill>
-              <a:srgbClr val="13301F"/>
+              <a:srgbClr val="1C2418"/>
             </a:solidFill>
             <a:prstDash val="solid"/>
           </a:ln>
@@ -9634,7 +9634,7 @@
             <a:r>
               <a:rPr lang="en-US" sz="1700" b="1" dirty="0">
                 <a:solidFill>
-                  <a:srgbClr val="3CE87C"/>
+                  <a:srgbClr val="6AA84F"/>
                 </a:solidFill>
               </a:rPr>
               <a:t>The fix</a:t>
@@ -9749,7 +9749,7 @@
             <a:lvl1pPr>
               <a:defRPr sz="1000">
                 <a:solidFill>
-                  <a:srgbClr val="94A7B8"/>
+                  <a:srgbClr val="8C887F"/>
                 </a:solidFill>
               </a:defRPr>
             </a:lvl1pPr>
@@ -9789,40 +9789,40 @@
   <a:themeElements>
     <a:clrScheme name="SmartTraffic Signal">
       <a:dk1>
-        <a:srgbClr val="0E1620"/>
+        <a:srgbClr val="16161A"/>
       </a:dk1>
       <a:lt1>
-        <a:srgbClr val="FFFFFF"/>
+        <a:srgbClr val="F2EFE9"/>
       </a:lt1>
       <a:dk2>
-        <a:srgbClr val="1B2A3A"/>
+        <a:srgbClr val="21222A"/>
       </a:dk2>
       <a:lt2>
-        <a:srgbClr val="EEF3F7"/>
+        <a:srgbClr val="E4E0D8"/>
       </a:lt2>
       <a:accent1>
-        <a:srgbClr val="FFB347"/>
+        <a:srgbClr val="E8A33D"/>
       </a:accent1>
       <a:accent2>
-        <a:srgbClr val="3CE87C"/>
+        <a:srgbClr val="6AA84F"/>
       </a:accent2>
       <a:accent3>
-        <a:srgbClr val="FF5A5A"/>
+        <a:srgbClr val="C8503F"/>
       </a:accent3>
       <a:accent4>
-        <a:srgbClr val="8FD8FF"/>
+        <a:srgbClr val="A8A398"/>
       </a:accent4>
       <a:accent5>
-        <a:srgbClr val="94A7B8"/>
+        <a:srgbClr val="8C887F"/>
       </a:accent5>
       <a:accent6>
-        <a:srgbClr val="C9A227"/>
+        <a:srgbClr val="B0883C"/>
       </a:accent6>
       <a:hlink>
-        <a:srgbClr val="8FD8FF"/>
+        <a:srgbClr val="E8A33D"/>
       </a:hlink>
       <a:folHlink>
-        <a:srgbClr val="94A7B8"/>
+        <a:srgbClr val="8C887F"/>
       </a:folHlink>
     </a:clrScheme>
     <a:fontScheme name="SmartTraffic Signal">

--- a/docs/deck/SmartTraffic-full.pptx
+++ b/docs/deck/SmartTraffic-full.pptx
@@ -120,44 +120,44 @@
   <p:extLst>
     <p:ext uri="{521415D9-36F7-43E2-AB2F-B90AF26B5E84}">
       <p14:sectionLst xmlns:p14="http://schemas.microsoft.com/office/powerpoint/2010/main">
-        <p14:section name="Opening" id="{4d03c8c9-e649-9df5-f280-6b5135f24dd1}">
+        <p14:section name="Opening" id="{afebcd74-524f-6396-9539-e40c5d671903}">
           <p14:sldIdLst>
             <p14:sldId id="256"/>
           </p14:sldIdLst>
         </p14:section>
-        <p14:section name="Problem" id="{02816636-7aa8-73a5-88dd-69efb34e2c04}">
+        <p14:section name="Problem" id="{fee4edc1-b398-0bdc-11d7-40b6a4872000}">
           <p14:sldIdLst>
             <p14:sldId id="257"/>
             <p14:sldId id="258"/>
           </p14:sldIdLst>
         </p14:section>
-        <p14:section name="The novelty" id="{c32cfb3f-bbe0-c1d6-0cad-5c7bb16e6993}">
+        <p14:section name="The novelty" id="{85cd96a4-12ed-b081-8bf1-19460b3472d6}">
           <p14:sldIdLst>
             <p14:sldId id="259"/>
             <p14:sldId id="260"/>
             <p14:sldId id="261"/>
           </p14:sldIdLst>
         </p14:section>
-        <p14:section name="Method" id="{f5bd2a7e-7b43-92d2-2c43-e14ed98f7984}">
+        <p14:section name="Method" id="{0de0e620-3d2b-2d43-565c-e1fc5f93dc22}">
           <p14:sldIdLst>
             <p14:sldId id="262"/>
           </p14:sldIdLst>
         </p14:section>
-        <p14:section name="Results" id="{a04a95a8-5c2e-b631-d3aa-05b7b41bbdbb}">
+        <p14:section name="Results" id="{3a554d44-13b8-11b4-4dbf-9d664a4253a3}">
           <p14:sldIdLst>
             <p14:sldId id="263"/>
             <p14:sldId id="264"/>
             <p14:sldId id="265"/>
           </p14:sldIdLst>
         </p14:section>
-        <p14:section name="Deployability" id="{173d2d04-fa0a-2b0f-e664-0d7c8200d78d}">
+        <p14:section name="Deployability" id="{8be75b16-9f1e-9151-ed35-a6373165834c}">
           <p14:sldIdLst>
             <p14:sldId id="266"/>
             <p14:sldId id="267"/>
             <p14:sldId id="268"/>
           </p14:sldIdLst>
         </p14:section>
-        <p14:section name="Close" id="{88977661-7cbd-35d8-0e0d-75d6b4f44ecb}">
+        <p14:section name="Close" id="{e218f768-fa71-f4ac-cf89-bd16e8c1b42a}">
           <p14:sldIdLst>
             <p14:sldId id="269"/>
           </p14:sldIdLst>
